--- a/Tableau/exports/Fleet Data Quality Command Center.pptx
+++ b/Tableau/exports/Fleet Data Quality Command Center.pptx
@@ -3327,7 +3327,7 @@
           <p:cNvPr id="0" name="slide1">
             <a:extLst>
               <a:ext uri="{FF2B5EF4-FFF2-40B4-BE49-F238E27FC236}">
-                <a16:creationId xmlns:a16="http://schemas.microsoft.com/office/drawing/2014/main" id="{09D5539A-9C47-42A0-B359-B0CA1427C188}"/>
+                <a16:creationId xmlns:a16="http://schemas.microsoft.com/office/drawing/2014/main" id="{2E3FCC39-9A09-44B2-812A-B313F71D620E}"/>
               </a:ext>
             </a:extLst>
           </p:cNvPr>
@@ -3357,7 +3357,7 @@
           <p:cNvPr id="1" name="slide1">
             <a:extLst>
               <a:ext uri="{FF2B5EF4-FFF2-40B4-BE49-F238E27FC236}">
-                <a16:creationId xmlns:a16="http://schemas.microsoft.com/office/drawing/2014/main" id="{4A2B67DB-8CBF-4B23-8722-1BDAAC53213D}"/>
+                <a16:creationId xmlns:a16="http://schemas.microsoft.com/office/drawing/2014/main" id="{E73C08B8-4BE7-46FC-B488-5C2E4EC7FA17}"/>
               </a:ext>
             </a:extLst>
           </p:cNvPr>
@@ -3375,7 +3375,7 @@
           <a:p>
             <a:r>
               <a:rPr/>
-              <a:t>File created on: 6/3/2026 5:41:14 AM</a:t>
+              <a:t>File created on: 6/3/2026 8:02:07 AM</a:t>
             </a:r>
           </a:p>
         </p:txBody>
@@ -3415,7 +3415,7 @@
           <p:cNvPr descr="Fleet Data Quality Command Center" id="2" name="slide2">
             <a:extLst>
               <a:ext uri="{FF2B5EF4-FFF2-40B4-BE49-F238E27FC236}">
-                <a16:creationId xmlns:a16="http://schemas.microsoft.com/office/drawing/2014/main" id="{0037200F-1476-4577-9284-D4F1C0737377}"/>
+                <a16:creationId xmlns:a16="http://schemas.microsoft.com/office/drawing/2014/main" id="{C5056134-85E8-47CA-81C2-8AD50D38C178}"/>
               </a:ext>
             </a:extLst>
           </p:cNvPr>
